--- a/gyeongsan/GSJOB2_1교시_워크숍_내소개_흥미검사.pptx
+++ b/gyeongsan/GSJOB2_1교시_워크숍_내소개_흥미검사.pptx
@@ -3121,7 +3121,7 @@
             <a:avLst/>
           </a:prstGeom>
           <a:solidFill>
-            <a:srgbClr val="F1F7F5"/>
+            <a:srgbClr val="F2F5F9"/>
           </a:solidFill>
           <a:ln>
             <a:noFill/>
@@ -3241,7 +3241,7 @@
             <a:avLst/>
           </a:prstGeom>
           <a:solidFill>
-            <a:srgbClr val="EEF5F2"/>
+            <a:srgbClr val="EFF3F8"/>
           </a:solidFill>
           <a:ln>
             <a:noFill/>
@@ -3331,7 +3331,7 @@
             <a:avLst/>
           </a:prstGeom>
           <a:solidFill>
-            <a:srgbClr val="E1EEE9"/>
+            <a:srgbClr val="E3EAF3"/>
           </a:solidFill>
           <a:ln>
             <a:noFill/>
@@ -3436,7 +3436,7 @@
             <a:r>
               <a:rPr sz="2400" b="1" spc="120">
                 <a:solidFill>
-                  <a:srgbClr val="1E7F5B"/>
+                  <a:srgbClr val="2B5FA8"/>
                 </a:solidFill>
                 <a:latin typeface="Pretendard"/>
                 <a:ea typeface="Pretendard"/>
@@ -3639,7 +3639,7 @@
             <a:avLst/>
           </a:prstGeom>
           <a:solidFill>
-            <a:srgbClr val="F3F8F6"/>
+            <a:srgbClr val="F4F7FA"/>
           </a:solidFill>
           <a:ln>
             <a:noFill/>
@@ -3744,7 +3744,7 @@
             <a:r>
               <a:rPr sz="1950" b="1" spc="160">
                 <a:solidFill>
-                  <a:srgbClr val="1E7F5B"/>
+                  <a:srgbClr val="2B5FA8"/>
                 </a:solidFill>
                 <a:latin typeface="Pretendard"/>
                 <a:ea typeface="Pretendard"/>
@@ -4080,7 +4080,7 @@
             <a:avLst/>
           </a:prstGeom>
           <a:solidFill>
-            <a:srgbClr val="1E7F5B"/>
+            <a:srgbClr val="2B5FA8"/>
           </a:solidFill>
           <a:ln>
             <a:noFill/>
@@ -4408,7 +4408,7 @@
             <a:avLst/>
           </a:prstGeom>
           <a:solidFill>
-            <a:srgbClr val="1E7F5B"/>
+            <a:srgbClr val="2B5FA8"/>
           </a:solidFill>
           <a:ln>
             <a:noFill/>
@@ -4668,7 +4668,7 @@
             <a:avLst/>
           </a:prstGeom>
           <a:solidFill>
-            <a:srgbClr val="F3F8F6"/>
+            <a:srgbClr val="F4F7FA"/>
           </a:solidFill>
           <a:ln>
             <a:noFill/>
@@ -4773,7 +4773,7 @@
             <a:r>
               <a:rPr sz="2400" b="1">
                 <a:solidFill>
-                  <a:srgbClr val="1E7F5B"/>
+                  <a:srgbClr val="2B5FA8"/>
                 </a:solidFill>
                 <a:latin typeface="Pretendard"/>
                 <a:ea typeface="Pretendard"/>
@@ -5011,7 +5011,7 @@
             <a:avLst/>
           </a:prstGeom>
           <a:solidFill>
-            <a:srgbClr val="F3F8F6"/>
+            <a:srgbClr val="F4F7FA"/>
           </a:solidFill>
           <a:ln>
             <a:noFill/>
@@ -5116,7 +5116,7 @@
             <a:r>
               <a:rPr sz="1950" b="1" spc="160">
                 <a:solidFill>
-                  <a:srgbClr val="1E7F5B"/>
+                  <a:srgbClr val="2B5FA8"/>
                 </a:solidFill>
                 <a:latin typeface="Pretendard"/>
                 <a:ea typeface="Pretendard"/>
@@ -5247,7 +5247,7 @@
             <a:avLst/>
           </a:prstGeom>
           <a:solidFill>
-            <a:srgbClr val="1E7F5B"/>
+            <a:srgbClr val="2B5FA8"/>
           </a:solidFill>
           <a:ln>
             <a:noFill/>
@@ -5432,7 +5432,7 @@
             <a:avLst/>
           </a:prstGeom>
           <a:solidFill>
-            <a:srgbClr val="1E7F5B"/>
+            <a:srgbClr val="2B5FA8"/>
           </a:solidFill>
           <a:ln>
             <a:noFill/>
@@ -5617,7 +5617,7 @@
             <a:avLst/>
           </a:prstGeom>
           <a:solidFill>
-            <a:srgbClr val="1E7F5B"/>
+            <a:srgbClr val="2B5FA8"/>
           </a:solidFill>
           <a:ln>
             <a:noFill/>
@@ -5802,7 +5802,7 @@
             <a:avLst/>
           </a:prstGeom>
           <a:solidFill>
-            <a:srgbClr val="1E7F5B"/>
+            <a:srgbClr val="2B5FA8"/>
           </a:solidFill>
           <a:ln>
             <a:noFill/>
@@ -5987,7 +5987,7 @@
             <a:avLst/>
           </a:prstGeom>
           <a:solidFill>
-            <a:srgbClr val="1E7F5B"/>
+            <a:srgbClr val="2B5FA8"/>
           </a:solidFill>
           <a:ln>
             <a:noFill/>
@@ -6172,7 +6172,7 @@
             <a:avLst/>
           </a:prstGeom>
           <a:solidFill>
-            <a:srgbClr val="1E7F5B"/>
+            <a:srgbClr val="2B5FA8"/>
           </a:solidFill>
           <a:ln>
             <a:noFill/>
@@ -6453,7 +6453,7 @@
             <a:avLst/>
           </a:prstGeom>
           <a:solidFill>
-            <a:srgbClr val="F3F8F6"/>
+            <a:srgbClr val="F4F7FA"/>
           </a:solidFill>
           <a:ln>
             <a:noFill/>
@@ -6558,7 +6558,7 @@
             <a:r>
               <a:rPr sz="1950" b="1" spc="160">
                 <a:solidFill>
-                  <a:srgbClr val="1E7F5B"/>
+                  <a:srgbClr val="2B5FA8"/>
                 </a:solidFill>
                 <a:latin typeface="Pretendard"/>
                 <a:ea typeface="Pretendard"/>
@@ -7387,11 +7387,11 @@
             </a:avLst>
           </a:prstGeom>
           <a:solidFill>
-            <a:srgbClr val="E6F4EE"/>
+            <a:srgbClr val="EAF0F8"/>
           </a:solidFill>
           <a:ln w="9525">
             <a:solidFill>
-              <a:srgbClr val="C3E6D8"/>
+              <a:srgbClr val="C9DAF2"/>
             </a:solidFill>
           </a:ln>
           <a:effectLst/>
@@ -7590,7 +7590,7 @@
             <a:avLst/>
           </a:prstGeom>
           <a:solidFill>
-            <a:srgbClr val="F3F8F6"/>
+            <a:srgbClr val="F4F7FA"/>
           </a:solidFill>
           <a:ln>
             <a:noFill/>
@@ -7695,7 +7695,7 @@
             <a:r>
               <a:rPr sz="2400" b="1">
                 <a:solidFill>
-                  <a:srgbClr val="1E7F5B"/>
+                  <a:srgbClr val="2B5FA8"/>
                 </a:solidFill>
                 <a:latin typeface="Pretendard"/>
                 <a:ea typeface="Pretendard"/>
@@ -7933,7 +7933,7 @@
             <a:avLst/>
           </a:prstGeom>
           <a:solidFill>
-            <a:srgbClr val="F3F8F6"/>
+            <a:srgbClr val="F4F7FA"/>
           </a:solidFill>
           <a:ln>
             <a:noFill/>
@@ -8038,7 +8038,7 @@
             <a:r>
               <a:rPr sz="1950" b="1" spc="160">
                 <a:solidFill>
-                  <a:srgbClr val="1E7F5B"/>
+                  <a:srgbClr val="2B5FA8"/>
                 </a:solidFill>
                 <a:latin typeface="Pretendard"/>
                 <a:ea typeface="Pretendard"/>
@@ -8169,7 +8169,7 @@
             <a:avLst/>
           </a:prstGeom>
           <a:solidFill>
-            <a:srgbClr val="1E7F5B"/>
+            <a:srgbClr val="2B5FA8"/>
           </a:solidFill>
           <a:ln>
             <a:noFill/>
@@ -8354,7 +8354,7 @@
             <a:avLst/>
           </a:prstGeom>
           <a:solidFill>
-            <a:srgbClr val="1E7F5B"/>
+            <a:srgbClr val="2B5FA8"/>
           </a:solidFill>
           <a:ln>
             <a:noFill/>
@@ -8539,7 +8539,7 @@
             <a:avLst/>
           </a:prstGeom>
           <a:solidFill>
-            <a:srgbClr val="1E7F5B"/>
+            <a:srgbClr val="2B5FA8"/>
           </a:solidFill>
           <a:ln>
             <a:noFill/>
@@ -8724,7 +8724,7 @@
             <a:avLst/>
           </a:prstGeom>
           <a:solidFill>
-            <a:srgbClr val="1E7F5B"/>
+            <a:srgbClr val="2B5FA8"/>
           </a:solidFill>
           <a:ln>
             <a:noFill/>
@@ -8909,7 +8909,7 @@
             <a:avLst/>
           </a:prstGeom>
           <a:solidFill>
-            <a:srgbClr val="1E7F5B"/>
+            <a:srgbClr val="2B5FA8"/>
           </a:solidFill>
           <a:ln>
             <a:noFill/>
@@ -9094,7 +9094,7 @@
             <a:avLst/>
           </a:prstGeom>
           <a:solidFill>
-            <a:srgbClr val="1E7F5B"/>
+            <a:srgbClr val="2B5FA8"/>
           </a:solidFill>
           <a:ln>
             <a:noFill/>
@@ -9375,7 +9375,7 @@
             <a:avLst/>
           </a:prstGeom>
           <a:solidFill>
-            <a:srgbClr val="F3F8F6"/>
+            <a:srgbClr val="F4F7FA"/>
           </a:solidFill>
           <a:ln>
             <a:noFill/>
@@ -9480,7 +9480,7 @@
             <a:r>
               <a:rPr sz="1950" b="1" spc="160">
                 <a:solidFill>
-                  <a:srgbClr val="1E7F5B"/>
+                  <a:srgbClr val="2B5FA8"/>
                 </a:solidFill>
                 <a:latin typeface="Pretendard"/>
                 <a:ea typeface="Pretendard"/>
@@ -9816,7 +9816,7 @@
             <a:avLst/>
           </a:prstGeom>
           <a:solidFill>
-            <a:srgbClr val="1E7F5B"/>
+            <a:srgbClr val="2B5FA8"/>
           </a:solidFill>
           <a:ln>
             <a:noFill/>
@@ -10144,7 +10144,7 @@
             <a:avLst/>
           </a:prstGeom>
           <a:solidFill>
-            <a:srgbClr val="1E7F5B"/>
+            <a:srgbClr val="2B5FA8"/>
           </a:solidFill>
           <a:ln>
             <a:noFill/>
@@ -10568,7 +10568,7 @@
             <a:avLst/>
           </a:prstGeom>
           <a:solidFill>
-            <a:srgbClr val="F3F8F6"/>
+            <a:srgbClr val="F4F7FA"/>
           </a:solidFill>
           <a:ln>
             <a:noFill/>
@@ -10673,7 +10673,7 @@
             <a:r>
               <a:rPr sz="1950" b="1" spc="160">
                 <a:solidFill>
-                  <a:srgbClr val="1E7F5B"/>
+                  <a:srgbClr val="2B5FA8"/>
                 </a:solidFill>
                 <a:latin typeface="Pretendard"/>
                 <a:ea typeface="Pretendard"/>
@@ -10841,7 +10841,7 @@
             <a:avLst/>
           </a:prstGeom>
           <a:solidFill>
-            <a:srgbClr val="1E7F5B"/>
+            <a:srgbClr val="2B5FA8"/>
           </a:solidFill>
           <a:ln>
             <a:noFill/>
@@ -10912,7 +10912,7 @@
             <a:avLst/>
           </a:prstGeom>
           <a:solidFill>
-            <a:srgbClr val="1E7F5B"/>
+            <a:srgbClr val="2B5FA8"/>
           </a:solidFill>
           <a:ln>
             <a:noFill/>
@@ -10985,11 +10985,11 @@
             </a:avLst>
           </a:prstGeom>
           <a:solidFill>
-            <a:srgbClr val="E6F4EE"/>
+            <a:srgbClr val="EAF0F8"/>
           </a:solidFill>
           <a:ln w="9525">
             <a:solidFill>
-              <a:srgbClr val="C3E6D8"/>
+              <a:srgbClr val="C9DAF2"/>
             </a:solidFill>
           </a:ln>
           <a:effectLst/>
@@ -11210,11 +11210,11 @@
             </a:avLst>
           </a:prstGeom>
           <a:solidFill>
-            <a:srgbClr val="E6F4EE"/>
+            <a:srgbClr val="EAF0F8"/>
           </a:solidFill>
           <a:ln w="9525">
             <a:solidFill>
-              <a:srgbClr val="C3E6D8"/>
+              <a:srgbClr val="C9DAF2"/>
             </a:solidFill>
           </a:ln>
           <a:effectLst/>
@@ -11435,11 +11435,11 @@
             </a:avLst>
           </a:prstGeom>
           <a:solidFill>
-            <a:srgbClr val="E6F4EE"/>
+            <a:srgbClr val="EAF0F8"/>
           </a:solidFill>
           <a:ln w="9525">
             <a:solidFill>
-              <a:srgbClr val="C3E6D8"/>
+              <a:srgbClr val="C9DAF2"/>
             </a:solidFill>
           </a:ln>
           <a:effectLst/>
@@ -11829,7 +11829,7 @@
             <a:avLst/>
           </a:prstGeom>
           <a:solidFill>
-            <a:srgbClr val="F3F8F6"/>
+            <a:srgbClr val="F4F7FA"/>
           </a:solidFill>
           <a:ln>
             <a:noFill/>
@@ -11934,7 +11934,7 @@
             <a:r>
               <a:rPr sz="1950" b="1" spc="160">
                 <a:solidFill>
-                  <a:srgbClr val="1E7F5B"/>
+                  <a:srgbClr val="2B5FA8"/>
                 </a:solidFill>
                 <a:latin typeface="Pretendard"/>
                 <a:ea typeface="Pretendard"/>
@@ -12706,7 +12706,7 @@
             <a:avLst/>
           </a:prstGeom>
           <a:solidFill>
-            <a:srgbClr val="F3F8F6"/>
+            <a:srgbClr val="F4F7FA"/>
           </a:solidFill>
           <a:ln>
             <a:noFill/>
@@ -12811,7 +12811,7 @@
             <a:r>
               <a:rPr sz="2400" b="1">
                 <a:solidFill>
-                  <a:srgbClr val="1E7F5B"/>
+                  <a:srgbClr val="2B5FA8"/>
                 </a:solidFill>
                 <a:latin typeface="Pretendard"/>
                 <a:ea typeface="Pretendard"/>
@@ -12968,7 +12968,7 @@
             <a:r>
               <a:rPr sz="2475" b="1">
                 <a:solidFill>
-                  <a:srgbClr val="1E7F5B"/>
+                  <a:srgbClr val="2B5FA8"/>
                 </a:solidFill>
                 <a:latin typeface="Pretendard"/>
                 <a:ea typeface="Pretendard"/>
@@ -13084,7 +13084,7 @@
             <a:r>
               <a:rPr sz="2475" b="1">
                 <a:solidFill>
-                  <a:srgbClr val="1E7F5B"/>
+                  <a:srgbClr val="2B5FA8"/>
                 </a:solidFill>
                 <a:latin typeface="Pretendard"/>
                 <a:ea typeface="Pretendard"/>
@@ -13200,7 +13200,7 @@
             <a:r>
               <a:rPr sz="2475" b="1">
                 <a:solidFill>
-                  <a:srgbClr val="1E7F5B"/>
+                  <a:srgbClr val="2B5FA8"/>
                 </a:solidFill>
                 <a:latin typeface="Pretendard"/>
                 <a:ea typeface="Pretendard"/>
@@ -13316,7 +13316,7 @@
             <a:r>
               <a:rPr sz="2475" b="1">
                 <a:solidFill>
-                  <a:srgbClr val="1E7F5B"/>
+                  <a:srgbClr val="2B5FA8"/>
                 </a:solidFill>
                 <a:latin typeface="Pretendard"/>
                 <a:ea typeface="Pretendard"/>
@@ -13383,7 +13383,7 @@
             <a:avLst/>
           </a:prstGeom>
           <a:solidFill>
-            <a:srgbClr val="1E7F5B"/>
+            <a:srgbClr val="2B5FA8"/>
           </a:solidFill>
           <a:ln>
             <a:noFill/>
@@ -13428,7 +13428,7 @@
             <a:r>
               <a:rPr sz="1800" b="1" spc="140">
                 <a:solidFill>
-                  <a:srgbClr val="1E7F5B"/>
+                  <a:srgbClr val="2B5FA8"/>
                 </a:solidFill>
                 <a:latin typeface="Pretendard"/>
                 <a:ea typeface="Pretendard"/>
@@ -13513,7 +13513,7 @@
             <a:avLst/>
           </a:prstGeom>
           <a:solidFill>
-            <a:srgbClr val="F3F8F6"/>
+            <a:srgbClr val="F4F7FA"/>
           </a:solidFill>
           <a:ln>
             <a:noFill/>
@@ -13618,7 +13618,7 @@
             <a:r>
               <a:rPr sz="1950" b="1" spc="160">
                 <a:solidFill>
-                  <a:srgbClr val="1E7F5B"/>
+                  <a:srgbClr val="2B5FA8"/>
                 </a:solidFill>
                 <a:latin typeface="Pretendard"/>
                 <a:ea typeface="Pretendard"/>
@@ -13786,7 +13786,7 @@
             <a:avLst/>
           </a:prstGeom>
           <a:solidFill>
-            <a:srgbClr val="1E7F5B"/>
+            <a:srgbClr val="2B5FA8"/>
           </a:solidFill>
           <a:ln>
             <a:noFill/>
@@ -13857,7 +13857,7 @@
             <a:avLst/>
           </a:prstGeom>
           <a:solidFill>
-            <a:srgbClr val="1E7F5B"/>
+            <a:srgbClr val="2B5FA8"/>
           </a:solidFill>
           <a:ln>
             <a:noFill/>
@@ -13928,7 +13928,7 @@
             <a:avLst/>
           </a:prstGeom>
           <a:solidFill>
-            <a:srgbClr val="1E7F5B"/>
+            <a:srgbClr val="2B5FA8"/>
           </a:solidFill>
           <a:ln>
             <a:noFill/>
@@ -14001,11 +14001,11 @@
             </a:avLst>
           </a:prstGeom>
           <a:solidFill>
-            <a:srgbClr val="E6F4EE"/>
+            <a:srgbClr val="EAF0F8"/>
           </a:solidFill>
           <a:ln w="9525">
             <a:solidFill>
-              <a:srgbClr val="C3E6D8"/>
+              <a:srgbClr val="C9DAF2"/>
             </a:solidFill>
           </a:ln>
           <a:effectLst/>
@@ -14301,11 +14301,11 @@
             </a:avLst>
           </a:prstGeom>
           <a:solidFill>
-            <a:srgbClr val="E6F4EE"/>
+            <a:srgbClr val="EAF0F8"/>
           </a:solidFill>
           <a:ln w="9525">
             <a:solidFill>
-              <a:srgbClr val="C3E6D8"/>
+              <a:srgbClr val="C9DAF2"/>
             </a:solidFill>
           </a:ln>
           <a:effectLst/>
@@ -14601,11 +14601,11 @@
             </a:avLst>
           </a:prstGeom>
           <a:solidFill>
-            <a:srgbClr val="E6F4EE"/>
+            <a:srgbClr val="EAF0F8"/>
           </a:solidFill>
           <a:ln w="9525">
             <a:solidFill>
-              <a:srgbClr val="C3E6D8"/>
+              <a:srgbClr val="C9DAF2"/>
             </a:solidFill>
           </a:ln>
           <a:effectLst/>
@@ -14901,11 +14901,11 @@
             </a:avLst>
           </a:prstGeom>
           <a:solidFill>
-            <a:srgbClr val="E6F4EE"/>
+            <a:srgbClr val="EAF0F8"/>
           </a:solidFill>
           <a:ln w="9525">
             <a:solidFill>
-              <a:srgbClr val="C3E6D8"/>
+              <a:srgbClr val="C9DAF2"/>
             </a:solidFill>
           </a:ln>
           <a:effectLst/>
@@ -15201,11 +15201,11 @@
             </a:avLst>
           </a:prstGeom>
           <a:solidFill>
-            <a:srgbClr val="E6F4EE"/>
+            <a:srgbClr val="EAF0F8"/>
           </a:solidFill>
           <a:ln w="9525">
             <a:solidFill>
-              <a:srgbClr val="C3E6D8"/>
+              <a:srgbClr val="C9DAF2"/>
             </a:solidFill>
           </a:ln>
           <a:effectLst/>
@@ -15501,11 +15501,11 @@
             </a:avLst>
           </a:prstGeom>
           <a:solidFill>
-            <a:srgbClr val="E6F4EE"/>
+            <a:srgbClr val="EAF0F8"/>
           </a:solidFill>
           <a:ln w="9525">
             <a:solidFill>
-              <a:srgbClr val="C3E6D8"/>
+              <a:srgbClr val="C9DAF2"/>
             </a:solidFill>
           </a:ln>
           <a:effectLst/>
@@ -15801,11 +15801,11 @@
             </a:avLst>
           </a:prstGeom>
           <a:solidFill>
-            <a:srgbClr val="E6F4EE"/>
+            <a:srgbClr val="EAF0F8"/>
           </a:solidFill>
           <a:ln w="9525">
             <a:solidFill>
-              <a:srgbClr val="C3E6D8"/>
+              <a:srgbClr val="C9DAF2"/>
             </a:solidFill>
           </a:ln>
           <a:effectLst/>
@@ -16270,7 +16270,7 @@
             <a:avLst/>
           </a:prstGeom>
           <a:solidFill>
-            <a:srgbClr val="F3F8F6"/>
+            <a:srgbClr val="F4F7FA"/>
           </a:solidFill>
           <a:ln>
             <a:noFill/>
@@ -16375,7 +16375,7 @@
             <a:r>
               <a:rPr sz="1950" b="1" spc="160">
                 <a:solidFill>
-                  <a:srgbClr val="1E7F5B"/>
+                  <a:srgbClr val="2B5FA8"/>
                 </a:solidFill>
                 <a:latin typeface="Pretendard"/>
                 <a:ea typeface="Pretendard"/>
@@ -16711,7 +16711,7 @@
             <a:avLst/>
           </a:prstGeom>
           <a:solidFill>
-            <a:srgbClr val="1E7F5B"/>
+            <a:srgbClr val="2B5FA8"/>
           </a:solidFill>
           <a:ln>
             <a:noFill/>
@@ -17039,7 +17039,7 @@
             <a:avLst/>
           </a:prstGeom>
           <a:solidFill>
-            <a:srgbClr val="1E7F5B"/>
+            <a:srgbClr val="2B5FA8"/>
           </a:solidFill>
           <a:ln>
             <a:noFill/>
@@ -17463,7 +17463,7 @@
             <a:avLst/>
           </a:prstGeom>
           <a:solidFill>
-            <a:srgbClr val="F3F8F6"/>
+            <a:srgbClr val="F4F7FA"/>
           </a:solidFill>
           <a:ln>
             <a:noFill/>
@@ -17568,7 +17568,7 @@
             <a:r>
               <a:rPr sz="1950" b="1" spc="160">
                 <a:solidFill>
-                  <a:srgbClr val="1E7F5B"/>
+                  <a:srgbClr val="2B5FA8"/>
                 </a:solidFill>
                 <a:latin typeface="Pretendard"/>
                 <a:ea typeface="Pretendard"/>
@@ -18251,11 +18251,11 @@
             </a:avLst>
           </a:prstGeom>
           <a:solidFill>
-            <a:srgbClr val="E6F4EE"/>
+            <a:srgbClr val="EAF0F8"/>
           </a:solidFill>
           <a:ln w="9525">
             <a:solidFill>
-              <a:srgbClr val="C3E6D8"/>
+              <a:srgbClr val="C9DAF2"/>
             </a:solidFill>
           </a:ln>
           <a:effectLst/>
@@ -18454,7 +18454,7 @@
             <a:avLst/>
           </a:prstGeom>
           <a:solidFill>
-            <a:srgbClr val="F3F8F6"/>
+            <a:srgbClr val="F4F7FA"/>
           </a:solidFill>
           <a:ln>
             <a:noFill/>
@@ -18559,7 +18559,7 @@
             <a:r>
               <a:rPr sz="2400" b="1">
                 <a:solidFill>
-                  <a:srgbClr val="1E7F5B"/>
+                  <a:srgbClr val="2B5FA8"/>
                 </a:solidFill>
                 <a:latin typeface="Pretendard"/>
                 <a:ea typeface="Pretendard"/>
@@ -18797,7 +18797,7 @@
             <a:avLst/>
           </a:prstGeom>
           <a:solidFill>
-            <a:srgbClr val="F3F8F6"/>
+            <a:srgbClr val="F4F7FA"/>
           </a:solidFill>
           <a:ln>
             <a:noFill/>
@@ -18902,7 +18902,7 @@
             <a:r>
               <a:rPr sz="1950" b="1" spc="160">
                 <a:solidFill>
-                  <a:srgbClr val="1E7F5B"/>
+                  <a:srgbClr val="2B5FA8"/>
                 </a:solidFill>
                 <a:latin typeface="Pretendard"/>
                 <a:ea typeface="Pretendard"/>
@@ -19238,7 +19238,7 @@
             <a:avLst/>
           </a:prstGeom>
           <a:solidFill>
-            <a:srgbClr val="1E7F5B"/>
+            <a:srgbClr val="2B5FA8"/>
           </a:solidFill>
           <a:ln>
             <a:noFill/>
@@ -19566,7 +19566,7 @@
             <a:avLst/>
           </a:prstGeom>
           <a:solidFill>
-            <a:srgbClr val="1E7F5B"/>
+            <a:srgbClr val="2B5FA8"/>
           </a:solidFill>
           <a:ln>
             <a:noFill/>
@@ -19826,7 +19826,7 @@
             <a:avLst/>
           </a:prstGeom>
           <a:solidFill>
-            <a:srgbClr val="F3F8F6"/>
+            <a:srgbClr val="F4F7FA"/>
           </a:solidFill>
           <a:ln>
             <a:noFill/>
@@ -19918,7 +19918,7 @@
             </a:avLst>
           </a:prstGeom>
           <a:solidFill>
-            <a:srgbClr val="1E7F5B"/>
+            <a:srgbClr val="2B5FA8"/>
           </a:solidFill>
           <a:ln>
             <a:noFill/>
@@ -20034,7 +20034,7 @@
             <a:r>
               <a:rPr sz="1950" b="1" spc="160">
                 <a:solidFill>
-                  <a:srgbClr val="1E7F5B"/>
+                  <a:srgbClr val="2B5FA8"/>
                 </a:solidFill>
                 <a:latin typeface="Pretendard"/>
                 <a:ea typeface="Pretendard"/>
@@ -21079,7 +21079,7 @@
             <a:avLst/>
           </a:prstGeom>
           <a:solidFill>
-            <a:srgbClr val="C3E6D8"/>
+            <a:srgbClr val="C9DAF2"/>
           </a:solidFill>
           <a:ln>
             <a:noFill/>
@@ -21280,7 +21280,7 @@
             <a:avLst/>
           </a:prstGeom>
           <a:solidFill>
-            <a:srgbClr val="F3F8F6"/>
+            <a:srgbClr val="F4F7FA"/>
           </a:solidFill>
           <a:ln>
             <a:noFill/>
@@ -21385,7 +21385,7 @@
             <a:r>
               <a:rPr sz="1950" b="1" spc="160">
                 <a:solidFill>
-                  <a:srgbClr val="1E7F5B"/>
+                  <a:srgbClr val="2B5FA8"/>
                 </a:solidFill>
                 <a:latin typeface="Pretendard"/>
                 <a:ea typeface="Pretendard"/>
@@ -22132,7 +22132,7 @@
             <a:avLst/>
           </a:prstGeom>
           <a:solidFill>
-            <a:srgbClr val="C3E6D8"/>
+            <a:srgbClr val="C9DAF2"/>
           </a:solidFill>
           <a:ln>
             <a:noFill/>
@@ -22333,7 +22333,7 @@
             <a:avLst/>
           </a:prstGeom>
           <a:solidFill>
-            <a:srgbClr val="F3F8F6"/>
+            <a:srgbClr val="F4F7FA"/>
           </a:solidFill>
           <a:ln>
             <a:noFill/>
@@ -22438,7 +22438,7 @@
             <a:r>
               <a:rPr sz="2400" b="1">
                 <a:solidFill>
-                  <a:srgbClr val="1E7F5B"/>
+                  <a:srgbClr val="2B5FA8"/>
                 </a:solidFill>
                 <a:latin typeface="Pretendard"/>
                 <a:ea typeface="Pretendard"/>
